--- a/docs/presentation/MindMate_Final_Presentation.pptx
+++ b/docs/presentation/MindMate_Final_Presentation.pptx
@@ -3231,7 +3231,7 @@
                 </a:solidFill>
                 <a:latin typeface="Calibri"/>
               </a:rPr>
-              <a:t>Submitted by: Ganesh L   |   Enrolment No: [Enrolment Number]</a:t>
+              <a:t>Submitted by: Ganesh L   |   Enrolment No: O24MSD110165</a:t>
             </a:r>
           </a:p>
           <a:p>
